--- a/chapter7/parts/part-03-detecting-bias-statistically/clip.pptx
+++ b/chapter7/parts/part-03-detecting-bias-statistically/clip.pptx
@@ -4398,10 +4398,12 @@
           </a:bodyPr>
           <a:lstStyle/>
           <a:p>
-            <a:pPr>
+            <a:pPr lvl="0" marL="457200" indent="-228600">
+              <a:buFont typeface="Calibri"/>
               <a:spcAft>
                 <a:spcPts val="1000"/>
               </a:spcAft>
+              <a:buSzPct val="100000"/>
               <a:buChar char="•"/>
               <a:lnSpc>
                 <a:spcPts val="2200"/>
@@ -4418,10 +4420,12 @@
             </a:r>
           </a:p>
           <a:p>
-            <a:pPr>
+            <a:pPr lvl="0" marL="457200" indent="-228600">
+              <a:buFont typeface="Calibri"/>
               <a:spcAft>
                 <a:spcPts val="1000"/>
               </a:spcAft>
+              <a:buSzPct val="100000"/>
               <a:buChar char="•"/>
               <a:lnSpc>
                 <a:spcPts val="2200"/>
@@ -4438,10 +4442,12 @@
             </a:r>
           </a:p>
           <a:p>
-            <a:pPr>
+            <a:pPr lvl="0" marL="457200" indent="-228600">
+              <a:buFont typeface="Calibri"/>
               <a:spcAft>
                 <a:spcPts val="1000"/>
               </a:spcAft>
+              <a:buSzPct val="100000"/>
               <a:buChar char="•"/>
               <a:lnSpc>
                 <a:spcPts val="2200"/>
@@ -4577,10 +4583,12 @@
           </a:bodyPr>
           <a:lstStyle/>
           <a:p>
-            <a:pPr>
+            <a:pPr lvl="0" marL="457200" indent="-228600">
+              <a:buFont typeface="Calibri"/>
               <a:spcAft>
                 <a:spcPts val="1000"/>
               </a:spcAft>
+              <a:buSzPct val="100000"/>
               <a:buChar char="•"/>
               <a:lnSpc>
                 <a:spcPts val="2200"/>
@@ -4597,10 +4605,12 @@
             </a:r>
           </a:p>
           <a:p>
-            <a:pPr>
+            <a:pPr lvl="0" marL="457200" indent="-228600">
+              <a:buFont typeface="Calibri"/>
               <a:spcAft>
                 <a:spcPts val="1000"/>
               </a:spcAft>
+              <a:buSzPct val="100000"/>
               <a:buChar char="•"/>
               <a:lnSpc>
                 <a:spcPts val="2200"/>
@@ -4617,10 +4627,12 @@
             </a:r>
           </a:p>
           <a:p>
-            <a:pPr>
+            <a:pPr lvl="0" marL="457200" indent="-228600">
+              <a:buFont typeface="Calibri"/>
               <a:spcAft>
                 <a:spcPts val="1000"/>
               </a:spcAft>
+              <a:buSzPct val="100000"/>
               <a:buChar char="•"/>
               <a:lnSpc>
                 <a:spcPts val="2200"/>
@@ -4637,10 +4649,12 @@
             </a:r>
           </a:p>
           <a:p>
-            <a:pPr>
+            <a:pPr lvl="0" marL="457200" indent="-228600">
+              <a:buFont typeface="Calibri"/>
               <a:spcAft>
                 <a:spcPts val="1000"/>
               </a:spcAft>
+              <a:buSzPct val="100000"/>
               <a:buChar char="•"/>
               <a:lnSpc>
                 <a:spcPts val="2200"/>
@@ -4776,10 +4790,12 @@
           </a:bodyPr>
           <a:lstStyle/>
           <a:p>
-            <a:pPr>
+            <a:pPr lvl="0" marL="457200" indent="-228600">
+              <a:buFont typeface="Calibri"/>
               <a:spcAft>
                 <a:spcPts val="1000"/>
               </a:spcAft>
+              <a:buSzPct val="100000"/>
               <a:buChar char="•"/>
               <a:lnSpc>
                 <a:spcPts val="2200"/>
@@ -4796,10 +4812,12 @@
             </a:r>
           </a:p>
           <a:p>
-            <a:pPr>
+            <a:pPr lvl="0" marL="457200" indent="-228600">
+              <a:buFont typeface="Calibri"/>
               <a:spcAft>
                 <a:spcPts val="1000"/>
               </a:spcAft>
+              <a:buSzPct val="100000"/>
               <a:buChar char="•"/>
               <a:lnSpc>
                 <a:spcPts val="2200"/>
@@ -4935,10 +4953,12 @@
           </a:bodyPr>
           <a:lstStyle/>
           <a:p>
-            <a:pPr>
+            <a:pPr lvl="0" marL="457200" indent="-228600">
+              <a:buFont typeface="Calibri"/>
               <a:spcAft>
                 <a:spcPts val="1000"/>
               </a:spcAft>
+              <a:buSzPct val="100000"/>
               <a:buChar char="•"/>
               <a:lnSpc>
                 <a:spcPts val="2200"/>
@@ -5074,10 +5094,12 @@
           </a:bodyPr>
           <a:lstStyle/>
           <a:p>
-            <a:pPr>
+            <a:pPr lvl="0" marL="457200" indent="-228600">
+              <a:buFont typeface="Calibri"/>
               <a:spcAft>
                 <a:spcPts val="1000"/>
               </a:spcAft>
+              <a:buSzPct val="100000"/>
               <a:buChar char="•"/>
               <a:lnSpc>
                 <a:spcPts val="2200"/>
@@ -5094,10 +5116,12 @@
             </a:r>
           </a:p>
           <a:p>
-            <a:pPr>
+            <a:pPr lvl="0" marL="457200" indent="-228600">
+              <a:buFont typeface="Calibri"/>
               <a:spcAft>
                 <a:spcPts val="1000"/>
               </a:spcAft>
+              <a:buSzPct val="100000"/>
               <a:buChar char="•"/>
               <a:lnSpc>
                 <a:spcPts val="2200"/>
@@ -5114,10 +5138,12 @@
             </a:r>
           </a:p>
           <a:p>
-            <a:pPr>
+            <a:pPr lvl="0" marL="457200" indent="-228600">
+              <a:buFont typeface="Calibri"/>
               <a:spcAft>
                 <a:spcPts val="1000"/>
               </a:spcAft>
+              <a:buSzPct val="100000"/>
               <a:buChar char="•"/>
               <a:lnSpc>
                 <a:spcPts val="2200"/>
@@ -5134,10 +5160,12 @@
             </a:r>
           </a:p>
           <a:p>
-            <a:pPr>
+            <a:pPr lvl="0" marL="457200" indent="-228600">
+              <a:buFont typeface="Calibri"/>
               <a:spcAft>
                 <a:spcPts val="1000"/>
               </a:spcAft>
+              <a:buSzPct val="100000"/>
               <a:buChar char="•"/>
               <a:lnSpc>
                 <a:spcPts val="2200"/>
@@ -5154,10 +5182,12 @@
             </a:r>
           </a:p>
           <a:p>
-            <a:pPr>
+            <a:pPr lvl="0" marL="457200" indent="-228600">
+              <a:buFont typeface="Calibri"/>
               <a:spcAft>
                 <a:spcPts val="1000"/>
               </a:spcAft>
+              <a:buSzPct val="100000"/>
               <a:buChar char="•"/>
               <a:lnSpc>
                 <a:spcPts val="2200"/>
@@ -5756,10 +5786,12 @@
           </a:bodyPr>
           <a:lstStyle/>
           <a:p>
-            <a:pPr>
+            <a:pPr lvl="0" marL="457200" indent="-228600">
+              <a:buFont typeface="Calibri"/>
               <a:spcAft>
                 <a:spcPts val="1000"/>
               </a:spcAft>
+              <a:buSzPct val="100000"/>
               <a:buChar char="•"/>
               <a:lnSpc>
                 <a:spcPts val="2200"/>
@@ -5776,10 +5808,12 @@
             </a:r>
           </a:p>
           <a:p>
-            <a:pPr>
+            <a:pPr lvl="0" marL="457200" indent="-228600">
+              <a:buFont typeface="Calibri"/>
               <a:spcAft>
                 <a:spcPts val="1000"/>
               </a:spcAft>
+              <a:buSzPct val="100000"/>
               <a:buChar char="•"/>
               <a:lnSpc>
                 <a:spcPts val="2200"/>
@@ -5796,10 +5830,12 @@
             </a:r>
           </a:p>
           <a:p>
-            <a:pPr>
+            <a:pPr lvl="0" marL="457200" indent="-228600">
+              <a:buFont typeface="Calibri"/>
               <a:spcAft>
                 <a:spcPts val="1000"/>
               </a:spcAft>
+              <a:buSzPct val="100000"/>
               <a:buChar char="•"/>
               <a:lnSpc>
                 <a:spcPts val="2200"/>
@@ -5816,10 +5852,12 @@
             </a:r>
           </a:p>
           <a:p>
-            <a:pPr>
+            <a:pPr lvl="0" marL="457200" indent="-228600">
+              <a:buFont typeface="Calibri"/>
               <a:spcAft>
                 <a:spcPts val="1000"/>
               </a:spcAft>
+              <a:buSzPct val="100000"/>
               <a:buChar char="•"/>
               <a:lnSpc>
                 <a:spcPts val="2200"/>
@@ -5836,10 +5874,12 @@
             </a:r>
           </a:p>
           <a:p>
-            <a:pPr>
+            <a:pPr lvl="0" marL="457200" indent="-228600">
+              <a:buFont typeface="Calibri"/>
               <a:spcAft>
                 <a:spcPts val="1000"/>
               </a:spcAft>
+              <a:buSzPct val="100000"/>
               <a:buChar char="•"/>
               <a:lnSpc>
                 <a:spcPts val="2200"/>
@@ -5975,10 +6015,12 @@
           </a:bodyPr>
           <a:lstStyle/>
           <a:p>
-            <a:pPr>
+            <a:pPr lvl="0" marL="457200" indent="-228600">
+              <a:buFont typeface="Calibri"/>
               <a:spcAft>
                 <a:spcPts val="1000"/>
               </a:spcAft>
+              <a:buSzPct val="100000"/>
               <a:buChar char="•"/>
               <a:lnSpc>
                 <a:spcPts val="2200"/>
@@ -5995,10 +6037,12 @@
             </a:r>
           </a:p>
           <a:p>
-            <a:pPr>
+            <a:pPr lvl="0" marL="457200" indent="-228600">
+              <a:buFont typeface="Calibri"/>
               <a:spcAft>
                 <a:spcPts val="1000"/>
               </a:spcAft>
+              <a:buSzPct val="100000"/>
               <a:buChar char="•"/>
               <a:lnSpc>
                 <a:spcPts val="2200"/>
@@ -6015,10 +6059,12 @@
             </a:r>
           </a:p>
           <a:p>
-            <a:pPr>
+            <a:pPr lvl="0" marL="457200" indent="-228600">
+              <a:buFont typeface="Calibri"/>
               <a:spcAft>
                 <a:spcPts val="1000"/>
               </a:spcAft>
+              <a:buSzPct val="100000"/>
               <a:buChar char="•"/>
               <a:lnSpc>
                 <a:spcPts val="2200"/>
@@ -6035,10 +6081,12 @@
             </a:r>
           </a:p>
           <a:p>
-            <a:pPr>
+            <a:pPr lvl="0" marL="457200" indent="-228600">
+              <a:buFont typeface="Calibri"/>
               <a:spcAft>
                 <a:spcPts val="1000"/>
               </a:spcAft>
+              <a:buSzPct val="100000"/>
               <a:buChar char="•"/>
               <a:lnSpc>
                 <a:spcPts val="2200"/>
@@ -6174,10 +6222,12 @@
           </a:bodyPr>
           <a:lstStyle/>
           <a:p>
-            <a:pPr>
+            <a:pPr lvl="0" marL="457200" indent="-228600">
+              <a:buFont typeface="Calibri"/>
               <a:spcAft>
                 <a:spcPts val="1000"/>
               </a:spcAft>
+              <a:buSzPct val="100000"/>
               <a:buChar char="•"/>
               <a:lnSpc>
                 <a:spcPts val="2200"/>
@@ -6194,10 +6244,12 @@
             </a:r>
           </a:p>
           <a:p>
-            <a:pPr>
+            <a:pPr lvl="0" marL="457200" indent="-228600">
+              <a:buFont typeface="Calibri"/>
               <a:spcAft>
                 <a:spcPts val="1000"/>
               </a:spcAft>
+              <a:buSzPct val="100000"/>
               <a:buChar char="•"/>
               <a:lnSpc>
                 <a:spcPts val="2200"/>
@@ -6214,10 +6266,12 @@
             </a:r>
           </a:p>
           <a:p>
-            <a:pPr>
+            <a:pPr lvl="0" marL="457200" indent="-228600">
+              <a:buFont typeface="Calibri"/>
               <a:spcAft>
                 <a:spcPts val="1000"/>
               </a:spcAft>
+              <a:buSzPct val="100000"/>
               <a:buChar char="•"/>
               <a:lnSpc>
                 <a:spcPts val="2200"/>
@@ -6234,10 +6288,12 @@
             </a:r>
           </a:p>
           <a:p>
-            <a:pPr>
+            <a:pPr lvl="0" marL="457200" indent="-228600">
+              <a:buFont typeface="Calibri"/>
               <a:spcAft>
                 <a:spcPts val="1000"/>
               </a:spcAft>
+              <a:buSzPct val="100000"/>
               <a:buChar char="•"/>
               <a:lnSpc>
                 <a:spcPts val="2200"/>
@@ -6254,10 +6310,12 @@
             </a:r>
           </a:p>
           <a:p>
-            <a:pPr>
+            <a:pPr lvl="0" marL="457200" indent="-228600">
+              <a:buFont typeface="Calibri"/>
               <a:spcAft>
                 <a:spcPts val="1000"/>
               </a:spcAft>
+              <a:buSzPct val="100000"/>
               <a:buChar char="•"/>
               <a:lnSpc>
                 <a:spcPts val="2200"/>
@@ -6393,10 +6451,12 @@
           </a:bodyPr>
           <a:lstStyle/>
           <a:p>
-            <a:pPr>
+            <a:pPr lvl="0" marL="457200" indent="-228600">
+              <a:buFont typeface="Calibri"/>
               <a:spcAft>
                 <a:spcPts val="1000"/>
               </a:spcAft>
+              <a:buSzPct val="100000"/>
               <a:buChar char="•"/>
               <a:lnSpc>
                 <a:spcPts val="2200"/>
@@ -6413,10 +6473,12 @@
             </a:r>
           </a:p>
           <a:p>
-            <a:pPr>
+            <a:pPr lvl="0" marL="457200" indent="-228600">
+              <a:buFont typeface="Calibri"/>
               <a:spcAft>
                 <a:spcPts val="1000"/>
               </a:spcAft>
+              <a:buSzPct val="100000"/>
               <a:buChar char="•"/>
               <a:lnSpc>
                 <a:spcPts val="2200"/>
@@ -6433,10 +6495,12 @@
             </a:r>
           </a:p>
           <a:p>
-            <a:pPr>
+            <a:pPr lvl="0" marL="457200" indent="-228600">
+              <a:buFont typeface="Calibri"/>
               <a:spcAft>
                 <a:spcPts val="1000"/>
               </a:spcAft>
+              <a:buSzPct val="100000"/>
               <a:buChar char="•"/>
               <a:lnSpc>
                 <a:spcPts val="2200"/>
@@ -6572,10 +6636,12 @@
           </a:bodyPr>
           <a:lstStyle/>
           <a:p>
-            <a:pPr>
+            <a:pPr lvl="0" marL="457200" indent="-228600">
+              <a:buFont typeface="Calibri"/>
               <a:spcAft>
                 <a:spcPts val="1000"/>
               </a:spcAft>
+              <a:buSzPct val="100000"/>
               <a:buChar char="•"/>
               <a:lnSpc>
                 <a:spcPts val="2200"/>
@@ -6592,10 +6658,12 @@
             </a:r>
           </a:p>
           <a:p>
-            <a:pPr>
+            <a:pPr lvl="0" marL="457200" indent="-228600">
+              <a:buFont typeface="Calibri"/>
               <a:spcAft>
                 <a:spcPts val="1000"/>
               </a:spcAft>
+              <a:buSzPct val="100000"/>
               <a:buChar char="•"/>
               <a:lnSpc>
                 <a:spcPts val="2200"/>
@@ -6612,10 +6680,12 @@
             </a:r>
           </a:p>
           <a:p>
-            <a:pPr>
+            <a:pPr lvl="0" marL="457200" indent="-228600">
+              <a:buFont typeface="Calibri"/>
               <a:spcAft>
                 <a:spcPts val="1000"/>
               </a:spcAft>
+              <a:buSzPct val="100000"/>
               <a:buChar char="•"/>
               <a:lnSpc>
                 <a:spcPts val="2200"/>
@@ -6632,10 +6702,12 @@
             </a:r>
           </a:p>
           <a:p>
-            <a:pPr>
+            <a:pPr lvl="0" marL="457200" indent="-228600">
+              <a:buFont typeface="Calibri"/>
               <a:spcAft>
                 <a:spcPts val="1000"/>
               </a:spcAft>
+              <a:buSzPct val="100000"/>
               <a:buChar char="•"/>
               <a:lnSpc>
                 <a:spcPts val="2200"/>
@@ -6652,10 +6724,12 @@
             </a:r>
           </a:p>
           <a:p>
-            <a:pPr>
+            <a:pPr lvl="0" marL="457200" indent="-228600">
+              <a:buFont typeface="Calibri"/>
               <a:spcAft>
                 <a:spcPts val="1000"/>
               </a:spcAft>
+              <a:buSzPct val="100000"/>
               <a:buChar char="•"/>
               <a:lnSpc>
                 <a:spcPts val="2200"/>
